--- a/Employee Promotion Prediction.pptx
+++ b/Employee Promotion Prediction.pptx
@@ -843,7 +843,7 @@
           <a:p>
             <a:fld id="{D11CDB4C-BA7A-457B-9215-CB4D244B4A4A}" type="datetimeFigureOut">
               <a:rPr lang="en-US" smtClean="0"/>
-              <a:t>1/4/2026</a:t>
+              <a:t>1/9/2026</a:t>
             </a:fld>
             <a:endParaRPr lang="en-US"/>
           </a:p>
@@ -1094,7 +1094,7 @@
           <a:p>
             <a:fld id="{D11CDB4C-BA7A-457B-9215-CB4D244B4A4A}" type="datetimeFigureOut">
               <a:rPr lang="en-US" smtClean="0"/>
-              <a:t>1/4/2026</a:t>
+              <a:t>1/9/2026</a:t>
             </a:fld>
             <a:endParaRPr lang="en-US"/>
           </a:p>
@@ -1408,7 +1408,7 @@
           <a:p>
             <a:fld id="{D11CDB4C-BA7A-457B-9215-CB4D244B4A4A}" type="datetimeFigureOut">
               <a:rPr lang="en-US" smtClean="0"/>
-              <a:t>1/4/2026</a:t>
+              <a:t>1/9/2026</a:t>
             </a:fld>
             <a:endParaRPr lang="en-US"/>
           </a:p>
@@ -1749,7 +1749,7 @@
           <a:p>
             <a:fld id="{D11CDB4C-BA7A-457B-9215-CB4D244B4A4A}" type="datetimeFigureOut">
               <a:rPr lang="en-US" smtClean="0"/>
-              <a:t>1/4/2026</a:t>
+              <a:t>1/9/2026</a:t>
             </a:fld>
             <a:endParaRPr lang="en-US"/>
           </a:p>
@@ -2063,7 +2063,7 @@
           <a:p>
             <a:fld id="{D11CDB4C-BA7A-457B-9215-CB4D244B4A4A}" type="datetimeFigureOut">
               <a:rPr lang="en-US" smtClean="0"/>
-              <a:t>1/4/2026</a:t>
+              <a:t>1/9/2026</a:t>
             </a:fld>
             <a:endParaRPr lang="en-US"/>
           </a:p>
@@ -2456,7 +2456,7 @@
           <a:p>
             <a:fld id="{D11CDB4C-BA7A-457B-9215-CB4D244B4A4A}" type="datetimeFigureOut">
               <a:rPr lang="en-US" smtClean="0"/>
-              <a:t>1/4/2026</a:t>
+              <a:t>1/9/2026</a:t>
             </a:fld>
             <a:endParaRPr lang="en-US"/>
           </a:p>
@@ -2626,7 +2626,7 @@
           <a:p>
             <a:fld id="{D11CDB4C-BA7A-457B-9215-CB4D244B4A4A}" type="datetimeFigureOut">
               <a:rPr lang="en-US" smtClean="0"/>
-              <a:t>1/4/2026</a:t>
+              <a:t>1/9/2026</a:t>
             </a:fld>
             <a:endParaRPr lang="en-US"/>
           </a:p>
@@ -2806,7 +2806,7 @@
           <a:p>
             <a:fld id="{D11CDB4C-BA7A-457B-9215-CB4D244B4A4A}" type="datetimeFigureOut">
               <a:rPr lang="en-US" smtClean="0"/>
-              <a:t>1/4/2026</a:t>
+              <a:t>1/9/2026</a:t>
             </a:fld>
             <a:endParaRPr lang="en-US"/>
           </a:p>
@@ -2982,7 +2982,7 @@
           <a:p>
             <a:fld id="{D11CDB4C-BA7A-457B-9215-CB4D244B4A4A}" type="datetimeFigureOut">
               <a:rPr lang="en-US" smtClean="0"/>
-              <a:t>1/4/2026</a:t>
+              <a:t>1/9/2026</a:t>
             </a:fld>
             <a:endParaRPr lang="en-US"/>
           </a:p>
@@ -3229,7 +3229,7 @@
           <a:p>
             <a:fld id="{D11CDB4C-BA7A-457B-9215-CB4D244B4A4A}" type="datetimeFigureOut">
               <a:rPr lang="en-US" smtClean="0"/>
-              <a:t>1/4/2026</a:t>
+              <a:t>1/9/2026</a:t>
             </a:fld>
             <a:endParaRPr lang="en-US"/>
           </a:p>
@@ -3461,7 +3461,7 @@
           <a:p>
             <a:fld id="{D11CDB4C-BA7A-457B-9215-CB4D244B4A4A}" type="datetimeFigureOut">
               <a:rPr lang="en-US" smtClean="0"/>
-              <a:t>1/4/2026</a:t>
+              <a:t>1/9/2026</a:t>
             </a:fld>
             <a:endParaRPr lang="en-US"/>
           </a:p>
@@ -3835,7 +3835,7 @@
           <a:p>
             <a:fld id="{D11CDB4C-BA7A-457B-9215-CB4D244B4A4A}" type="datetimeFigureOut">
               <a:rPr lang="en-US" smtClean="0"/>
-              <a:t>1/4/2026</a:t>
+              <a:t>1/9/2026</a:t>
             </a:fld>
             <a:endParaRPr lang="en-US"/>
           </a:p>
@@ -3958,7 +3958,7 @@
           <a:p>
             <a:fld id="{D11CDB4C-BA7A-457B-9215-CB4D244B4A4A}" type="datetimeFigureOut">
               <a:rPr lang="en-US" smtClean="0"/>
-              <a:t>1/4/2026</a:t>
+              <a:t>1/9/2026</a:t>
             </a:fld>
             <a:endParaRPr lang="en-US"/>
           </a:p>
@@ -4053,7 +4053,7 @@
           <a:p>
             <a:fld id="{D11CDB4C-BA7A-457B-9215-CB4D244B4A4A}" type="datetimeFigureOut">
               <a:rPr lang="en-US" smtClean="0"/>
-              <a:t>1/4/2026</a:t>
+              <a:t>1/9/2026</a:t>
             </a:fld>
             <a:endParaRPr lang="en-US"/>
           </a:p>
@@ -4308,7 +4308,7 @@
           <a:p>
             <a:fld id="{D11CDB4C-BA7A-457B-9215-CB4D244B4A4A}" type="datetimeFigureOut">
               <a:rPr lang="en-US" smtClean="0"/>
-              <a:t>1/4/2026</a:t>
+              <a:t>1/9/2026</a:t>
             </a:fld>
             <a:endParaRPr lang="en-US"/>
           </a:p>
@@ -4571,7 +4571,7 @@
           <a:p>
             <a:fld id="{D11CDB4C-BA7A-457B-9215-CB4D244B4A4A}" type="datetimeFigureOut">
               <a:rPr lang="en-US" smtClean="0"/>
-              <a:t>1/4/2026</a:t>
+              <a:t>1/9/2026</a:t>
             </a:fld>
             <a:endParaRPr lang="en-US"/>
           </a:p>
@@ -5314,7 +5314,7 @@
           <a:p>
             <a:fld id="{D11CDB4C-BA7A-457B-9215-CB4D244B4A4A}" type="datetimeFigureOut">
               <a:rPr lang="en-US" smtClean="0"/>
-              <a:t>1/4/2026</a:t>
+              <a:t>1/9/2026</a:t>
             </a:fld>
             <a:endParaRPr lang="en-US"/>
           </a:p>
@@ -6830,7 +6830,7 @@
         </p:spPr>
         <p:txBody>
           <a:bodyPr>
-            <a:normAutofit fontScale="85000" lnSpcReduction="20000"/>
+            <a:normAutofit fontScale="85000" lnSpcReduction="10000"/>
           </a:bodyPr>
           <a:lstStyle/>
           <a:p>
@@ -6928,23 +6928,7 @@
                 <a:ea typeface="Calibri" panose="020F0502020204030204" pitchFamily="34" charset="0"/>
                 <a:cs typeface="Calibri" panose="020F0502020204030204" pitchFamily="34" charset="0"/>
               </a:rPr>
-              <a:t>SMOTE oversampling to balance minority </a:t>
-            </a:r>
-            <a:r>
-              <a:rPr lang="en-US" sz="1600">
-                <a:latin typeface="Calibri" panose="020F0502020204030204" pitchFamily="34" charset="0"/>
-                <a:ea typeface="Calibri" panose="020F0502020204030204" pitchFamily="34" charset="0"/>
-                <a:cs typeface="Calibri" panose="020F0502020204030204" pitchFamily="34" charset="0"/>
-              </a:rPr>
-              <a:t>class (~60</a:t>
-            </a:r>
-            <a:r>
-              <a:rPr lang="en-US" sz="1600" dirty="0">
-                <a:latin typeface="Calibri" panose="020F0502020204030204" pitchFamily="34" charset="0"/>
-                <a:ea typeface="Calibri" panose="020F0502020204030204" pitchFamily="34" charset="0"/>
-                <a:cs typeface="Calibri" panose="020F0502020204030204" pitchFamily="34" charset="0"/>
-              </a:rPr>
-              <a:t>% of majority).</a:t>
+              <a:t>SMOTE oversampling to balance minority class (~60% of majority).</a:t>
             </a:r>
           </a:p>
           <a:p>
@@ -7069,30 +7053,17 @@
                 <a:ea typeface="Calibri" panose="020F0502020204030204" pitchFamily="34" charset="0"/>
                 <a:cs typeface="Calibri" panose="020F0502020204030204" pitchFamily="34" charset="0"/>
               </a:rPr>
-              <a:t>, we manually tuned the probability threshold (0.1–0.9) to maximize F1 score, because </a:t>
-            </a:r>
-          </a:p>
-          <a:p>
-            <a:pPr marL="0" indent="0">
-              <a:buNone/>
-            </a:pPr>
+              <a:t>, we manually tuned the key parameters because hyperparameter search didn’t improve performance in our case. </a:t>
+            </a:r>
+          </a:p>
+          <a:p>
             <a:r>
               <a:rPr lang="en-US" sz="1600" dirty="0">
                 <a:latin typeface="Calibri" panose="020F0502020204030204" pitchFamily="34" charset="0"/>
                 <a:ea typeface="Calibri" panose="020F0502020204030204" pitchFamily="34" charset="0"/>
                 <a:cs typeface="Calibri" panose="020F0502020204030204" pitchFamily="34" charset="0"/>
               </a:rPr>
-              <a:t>hyperparameter search didn’t improve performance in our case. </a:t>
-            </a:r>
-          </a:p>
-          <a:p>
-            <a:r>
-              <a:rPr lang="en-US" sz="1600" dirty="0">
-                <a:latin typeface="Calibri" panose="020F0502020204030204" pitchFamily="34" charset="0"/>
-                <a:ea typeface="Calibri" panose="020F0502020204030204" pitchFamily="34" charset="0"/>
-                <a:cs typeface="Calibri" panose="020F0502020204030204" pitchFamily="34" charset="0"/>
-              </a:rPr>
-              <a:t>Custom threshold tuning outperformed default 0.5</a:t>
+              <a:t>Custom threshold tuning - probability threshold (0.1–0.9) to maximize F1 score; Outperformed default 0.5 </a:t>
             </a:r>
           </a:p>
           <a:p>
